--- a/Recommender_Systems.pptx
+++ b/Recommender_Systems.pptx
@@ -20808,7 +20808,7 @@
         <p:spPr>
           <a:xfrm>
             <a:off x="0" y="0"/>
-            <a:ext cx="5514975" cy="1928813"/>
+            <a:ext cx="5514975" cy="2185988"/>
           </a:xfrm>
           <a:prstGeom prst="rect">
             <a:avLst/>
@@ -20911,31 +20911,7 @@
                 <a:cs typeface="Calibri"/>
                 <a:sym typeface="Calibri"/>
               </a:rPr>
-              <a:t> Theorem: Exchangeable random variable can be rewritten as   product of independent variables </a:t>
-            </a:r>
-            <a:r>
-              <a:rPr lang="en-US" sz="1200" dirty="0" err="1">
-                <a:solidFill>
-                  <a:schemeClr val="dk1"/>
-                </a:solidFill>
-                <a:latin typeface="Calibri"/>
-                <a:ea typeface="Calibri"/>
-                <a:cs typeface="Calibri"/>
-                <a:sym typeface="Calibri"/>
-              </a:rPr>
-              <a:t>conditionned</a:t>
-            </a:r>
-            <a:r>
-              <a:rPr lang="en-US" sz="1200" dirty="0">
-                <a:solidFill>
-                  <a:schemeClr val="dk1"/>
-                </a:solidFill>
-                <a:latin typeface="Calibri"/>
-                <a:ea typeface="Calibri"/>
-                <a:cs typeface="Calibri"/>
-                <a:sym typeface="Calibri"/>
-              </a:rPr>
-              <a:t> on some parameter (root cause).</a:t>
+              <a:t> Theorem: Exchangeable random variable can be rewritten as   product of independent variables conditioned on some parameter (root cause).</a:t>
             </a:r>
             <a:endParaRPr sz="1200" dirty="0"/>
           </a:p>
@@ -21313,8 +21289,8 @@
         </p:nvSpPr>
         <p:spPr>
           <a:xfrm>
-            <a:off x="6257925" y="271462"/>
-            <a:ext cx="5514976" cy="3631763"/>
+            <a:off x="5900738" y="271462"/>
+            <a:ext cx="6186487" cy="5386090"/>
           </a:xfrm>
           <a:prstGeom prst="rect">
             <a:avLst/>
@@ -21448,10 +21424,81 @@
               <a:rPr lang="en-US" sz="1200" dirty="0"/>
               <a:t> </a:t>
             </a:r>
+          </a:p>
+          <a:p>
+            <a:endParaRPr lang="en-US" sz="1200" dirty="0"/>
+          </a:p>
+          <a:p>
+            <a:r>
+              <a:rPr lang="en-US" sz="1200" dirty="0"/>
+              <a:t>======================================</a:t>
+            </a:r>
+          </a:p>
+          <a:p>
+            <a:r>
+              <a:rPr lang="en-US" sz="2000" b="1" dirty="0">
+                <a:solidFill>
+                  <a:srgbClr val="FF0000"/>
+                </a:solidFill>
+              </a:rPr>
+              <a:t>Amazon Personalize</a:t>
+            </a:r>
             <a:br>
               <a:rPr lang="en-US" sz="1200" dirty="0"/>
             </a:br>
-            <a:endParaRPr lang="en-US" sz="1200" dirty="0"/>
+            <a:r>
+              <a:rPr lang="en-US" sz="1200" dirty="0">
+                <a:hlinkClick r:id="rId16"/>
+              </a:rPr>
+              <a:t>https://aws.amazon.com/personalize/</a:t>
+            </a:r>
+            <a:r>
+              <a:rPr lang="en-US" sz="1200" dirty="0"/>
+              <a:t> </a:t>
+            </a:r>
+            <a:br>
+              <a:rPr lang="en-US" sz="1200" dirty="0"/>
+            </a:br>
+            <a:br>
+              <a:rPr lang="en-US" sz="1200" dirty="0"/>
+            </a:br>
+            <a:r>
+              <a:rPr lang="en-US" sz="1200" dirty="0"/>
+              <a:t>Pros of </a:t>
+            </a:r>
+            <a:r>
+              <a:rPr lang="en-US" sz="1200" b="1" dirty="0">
+                <a:solidFill>
+                  <a:srgbClr val="FF0000"/>
+                </a:solidFill>
+              </a:rPr>
+              <a:t>Amazon Personalize</a:t>
+            </a:r>
+            <a:r>
+              <a:rPr lang="en-US" sz="1200" dirty="0"/>
+              <a:t> :</a:t>
+            </a:r>
+            <a:br>
+              <a:rPr lang="en-US" sz="1200" dirty="0"/>
+            </a:br>
+            <a:r>
+              <a:rPr lang="en-US" sz="1200" dirty="0"/>
+              <a:t> - it is distributed and scalable, it works both in batch mode and real-time, you won't need heavy engineering</a:t>
+            </a:r>
+            <a:br>
+              <a:rPr lang="en-US" sz="1200" dirty="0"/>
+            </a:br>
+            <a:r>
+              <a:rPr lang="en-US" sz="1200" dirty="0"/>
+              <a:t> - it's feature-rich in terms of ML: contextual recommendations, cold-start solved, etc.</a:t>
+            </a:r>
+            <a:br>
+              <a:rPr lang="en-US" sz="1200" dirty="0"/>
+            </a:br>
+            <a:r>
+              <a:rPr lang="en-US" sz="1200" dirty="0"/>
+              <a:t> - it's from Amazon. They have some experience with recommendations</a:t>
+            </a:r>
           </a:p>
         </p:txBody>
       </p:sp>
